--- a/ゲーム科2年/00_前期/ゲーム開発Ⅰ/04_namespace.pptx
+++ b/ゲーム科2年/00_前期/ゲーム開発Ⅰ/04_namespace.pptx
@@ -3788,7 +3788,11 @@
               <a:t>を</a:t>
             </a:r>
             <a:r>
-              <a:rPr lang="en-US" altLang="ja-JP" sz="2400" dirty="0"/>
+              <a:rPr lang="en-US" altLang="ja-JP" sz="2400" b="1" dirty="0">
+                <a:solidFill>
+                  <a:srgbClr val="0070C0"/>
+                </a:solidFill>
+              </a:rPr>
               <a:t>namespace</a:t>
             </a:r>
             <a:r>
@@ -4044,7 +4048,7 @@
         <p:spPr>
           <a:xfrm>
             <a:off x="567542" y="1216429"/>
-            <a:ext cx="7988084" cy="461665"/>
+            <a:ext cx="8081058" cy="461665"/>
           </a:xfrm>
           <a:prstGeom prst="rect">
             <a:avLst/>
@@ -4070,7 +4074,11 @@
               <a:t>側も関数を全部</a:t>
             </a:r>
             <a:r>
-              <a:rPr lang="en-US" altLang="ja-JP" sz="2400" dirty="0"/>
+              <a:rPr lang="en-US" altLang="ja-JP" sz="2400" b="1" dirty="0">
+                <a:solidFill>
+                  <a:srgbClr val="0070C0"/>
+                </a:solidFill>
+              </a:rPr>
               <a:t>namespace</a:t>
             </a:r>
             <a:r>
